--- a/decks/david-samuel/Extol-x-David-Samuel-Advisory-Briefing.pptx
+++ b/decks/david-samuel/Extol-x-David-Samuel-Advisory-Briefing.pptx
@@ -124,26 +124,26 @@
   <p:extLst>
     <p:ext uri="{521415D9-36F7-43E2-AB2F-B90AF26B5E84}">
       <p14:sectionLst xmlns:p14="http://schemas.microsoft.com/office/powerpoint/2010/main">
-        <p14:section name="Opening" id="{95983ab8-08d8-6936-191b-33cf3b3ef835}">
+        <p14:section name="Opening" id="{1fa6126f-6388-3ef1-8f1b-1252e5377a04}">
           <p14:sldIdLst>
             <p14:sldId id="256"/>
             <p14:sldId id="257"/>
           </p14:sldIdLst>
         </p14:section>
-        <p14:section name="Who we are" id="{9627735b-b77b-d8da-dade-67f2eb245ffa}">
+        <p14:section name="Who we are" id="{998c28cf-ec9d-a400-30f2-316f6ad72fde}">
           <p14:sldIdLst>
             <p14:sldId id="258"/>
             <p14:sldId id="259"/>
             <p14:sldId id="260"/>
           </p14:sldIdLst>
         </p14:section>
-        <p14:section name="What we’ve done" id="{2d8bdf58-a2c5-8ffb-0ad8-3f2c6e70cabd}">
+        <p14:section name="What we’ve done" id="{91387f0a-82a2-b5f7-9096-2826636e78d2}">
           <p14:sldIdLst>
             <p14:sldId id="261"/>
             <p14:sldId id="262"/>
           </p14:sldIdLst>
         </p14:section>
-        <p14:section name="What we offer" id="{4d67d9aa-76ee-b9df-4adc-31b124fd0deb}">
+        <p14:section name="What we offer" id="{9decd1b6-142c-a46b-e91c-ef7bacd07c53}">
           <p14:sldIdLst>
             <p14:sldId id="263"/>
             <p14:sldId id="264"/>
@@ -152,7 +152,7 @@
             <p14:sldId id="267"/>
           </p14:sldIdLst>
         </p14:section>
-        <p14:section name="Your role" id="{bf3848b2-c3aa-4d11-6717-9ecfe95e7735}">
+        <p14:section name="Your role" id="{2c132a51-793f-ce43-4322-d40f4a5a1410}">
           <p14:sldIdLst>
             <p14:sldId id="268"/>
             <p14:sldId id="269"/>
@@ -161,7 +161,7 @@
             <p14:sldId id="272"/>
           </p14:sldIdLst>
         </p14:section>
-        <p14:section name="Close" id="{4b852219-598a-43a7-013d-bd82bbf80669}">
+        <p14:section name="Close" id="{45e165c0-f6ad-e8dd-7246-870487d8db0a}">
           <p14:sldIdLst>
             <p14:sldId id="273"/>
           </p14:sldIdLst>
@@ -9755,7 +9755,21 @@
                   <a:schemeClr val="tx2"/>
                 </a:solidFill>
               </a:rPr>
-              <a:t>Two founders: Dave runs strategy, Anshul runs delivery.</a:t>
+              <a:t>Devasya Dwivedi</a:t>
+            </a:r>
+            <a:endParaRPr lang="en-US" sz="1700" dirty="0"/>
+          </a:p>
+          <a:p>
+            <a:pPr indent="0" marL="0">
+              <a:buNone/>
+            </a:pPr>
+            <a:r>
+              <a:rPr lang="en-US" sz="1700" dirty="0">
+                <a:solidFill>
+                  <a:schemeClr val="tx2"/>
+                </a:solidFill>
+              </a:rPr>
+              <a:t>Anshul Mikita Prajapati</a:t>
             </a:r>
             <a:endParaRPr lang="en-US" sz="1700" dirty="0"/>
           </a:p>

--- a/decks/david-samuel/Extol-x-David-Samuel-Advisory-Briefing.pptx
+++ b/decks/david-samuel/Extol-x-David-Samuel-Advisory-Briefing.pptx
@@ -127,13 +127,13 @@
   <p:extLst>
     <p:ext uri="{521415D9-36F7-43E2-AB2F-B90AF26B5E84}">
       <p14:sectionLst xmlns:p14="http://schemas.microsoft.com/office/powerpoint/2010/main">
-        <p14:section name="Opening" id="{5db2995c-03b1-11f8-8156-ee1f65e99135}">
+        <p14:section name="Opening" id="{e236ed2f-6786-8aef-0e15-76bad0b29b06}">
           <p14:sldIdLst>
             <p14:sldId id="256"/>
             <p14:sldId id="257"/>
           </p14:sldIdLst>
         </p14:section>
-        <p14:section name="Who we are" id="{13d0b927-7329-895f-298f-6de459b1a5e4}">
+        <p14:section name="Who we are" id="{b28eef77-1e62-2510-d483-705aa26573d6}">
           <p14:sldIdLst>
             <p14:sldId id="258"/>
             <p14:sldId id="259"/>
@@ -141,13 +141,13 @@
             <p14:sldId id="261"/>
           </p14:sldIdLst>
         </p14:section>
-        <p14:section name="What we’ve done" id="{ac06cbdb-7617-67de-94c8-783002afefd3}">
+        <p14:section name="What we’ve done" id="{ea23935e-c9ef-1a40-01d9-5761f03dd643}">
           <p14:sldIdLst>
             <p14:sldId id="262"/>
             <p14:sldId id="263"/>
           </p14:sldIdLst>
         </p14:section>
-        <p14:section name="What we offer" id="{af620dbe-ac51-f7b3-673e-e5db64b0cacb}">
+        <p14:section name="What we offer" id="{bc390ed9-0f23-e185-f3ca-b310c1093ffd}">
           <p14:sldIdLst>
             <p14:sldId id="264"/>
             <p14:sldId id="265"/>
@@ -158,7 +158,7 @@
             <p14:sldId id="270"/>
           </p14:sldIdLst>
         </p14:section>
-        <p14:section name="Your role" id="{2bb4284b-2625-004a-1cfa-1f619ff3cdc4}">
+        <p14:section name="Your role" id="{ab637a48-e148-2340-8172-54ab2f735379}">
           <p14:sldIdLst>
             <p14:sldId id="271"/>
             <p14:sldId id="272"/>
@@ -167,7 +167,7 @@
             <p14:sldId id="275"/>
           </p14:sldIdLst>
         </p14:section>
-        <p14:section name="Close" id="{e41c9d0f-7737-ede6-c584-e86b60974fa8}">
+        <p14:section name="Close" id="{52b213e0-81ce-ac2e-ecb9-9a15dbeb7e3c}">
           <p14:sldIdLst>
             <p14:sldId id="276"/>
           </p14:sldIdLst>
@@ -399,7 +399,7 @@
                 <a:solidFill>
                   <a:srgbClr val="000000"/>
                 </a:solidFill>
-                <a:latin typeface="Arial"/>
+                <a:latin typeface="Helvetica"/>
               </a:defRPr>
             </a:pPr>
             <a:endParaRPr lang="en-US"/>
@@ -580,7 +580,7 @@
                     <a:solidFill>
                       <a:srgbClr val="000000"/>
                     </a:solidFill>
-                    <a:latin typeface="Arial"/>
+                    <a:latin typeface="Helvetica"/>
                   </a:defRPr>
                 </a:pPr>
               </a:p>
@@ -899,7 +899,7 @@
                 <a:solidFill>
                   <a:srgbClr val="000000"/>
                 </a:solidFill>
-                <a:latin typeface="Arial"/>
+                <a:latin typeface="Helvetica"/>
               </a:defRPr>
             </a:pPr>
             <a:endParaRPr lang="en-US"/>
@@ -1163,7 +1163,7 @@
                 <a:solidFill>
                   <a:srgbClr val="000000"/>
                 </a:solidFill>
-                <a:latin typeface="Arial"/>
+                <a:latin typeface="Helvetica"/>
               </a:defRPr>
             </a:pPr>
             <a:endParaRPr lang="en-US"/>
@@ -1471,7 +1471,7 @@
                 <a:solidFill>
                   <a:srgbClr val="000000"/>
                 </a:solidFill>
-                <a:latin typeface="Arial"/>
+                <a:latin typeface="Helvetica"/>
               </a:defRPr>
             </a:pPr>
             <a:endParaRPr lang="en-US"/>
@@ -3823,9 +3823,9 @@
                 <a:solidFill>
                   <a:schemeClr val="bg2"/>
                 </a:solidFill>
-                <a:latin typeface="Cambria" pitchFamily="34" charset="0"/>
-                <a:ea typeface="Cambria" pitchFamily="34" charset="-122"/>
-                <a:cs typeface="Cambria" pitchFamily="34" charset="-120"/>
+                <a:latin typeface="Helvetica" pitchFamily="34" charset="0"/>
+                <a:ea typeface="Helvetica" pitchFamily="34" charset="-122"/>
+                <a:cs typeface="Helvetica" pitchFamily="34" charset="-120"/>
               </a:defRPr>
             </a:lvl1pPr>
           </a:lstStyle>
@@ -3975,9 +3975,9 @@
                 <a:solidFill>
                   <a:schemeClr val="accent3"/>
                 </a:solidFill>
-                <a:latin typeface="Cambria" pitchFamily="34" charset="0"/>
-                <a:ea typeface="Cambria" pitchFamily="34" charset="-122"/>
-                <a:cs typeface="Cambria" pitchFamily="34" charset="-120"/>
+                <a:latin typeface="Helvetica" pitchFamily="34" charset="0"/>
+                <a:ea typeface="Helvetica" pitchFamily="34" charset="-122"/>
+                <a:cs typeface="Helvetica" pitchFamily="34" charset="-120"/>
               </a:defRPr>
             </a:lvl1pPr>
           </a:lstStyle>
@@ -4017,9 +4017,9 @@
                 <a:solidFill>
                   <a:schemeClr val="bg2"/>
                 </a:solidFill>
-                <a:latin typeface="Cambria" pitchFamily="34" charset="0"/>
-                <a:ea typeface="Cambria" pitchFamily="34" charset="-122"/>
-                <a:cs typeface="Cambria" pitchFamily="34" charset="-120"/>
+                <a:latin typeface="Helvetica" pitchFamily="34" charset="0"/>
+                <a:ea typeface="Helvetica" pitchFamily="34" charset="-122"/>
+                <a:cs typeface="Helvetica" pitchFamily="34" charset="-120"/>
               </a:defRPr>
             </a:lvl1pPr>
           </a:lstStyle>
@@ -4214,9 +4214,9 @@
                 <a:solidFill>
                   <a:schemeClr val="tx1"/>
                 </a:solidFill>
-                <a:latin typeface="Cambria" pitchFamily="34" charset="0"/>
-                <a:ea typeface="Cambria" pitchFamily="34" charset="-122"/>
-                <a:cs typeface="Cambria" pitchFamily="34" charset="-120"/>
+                <a:latin typeface="Helvetica" pitchFamily="34" charset="0"/>
+                <a:ea typeface="Helvetica" pitchFamily="34" charset="-122"/>
+                <a:cs typeface="Helvetica" pitchFamily="34" charset="-120"/>
               </a:defRPr>
             </a:lvl1pPr>
           </a:lstStyle>
@@ -4411,7 +4411,7 @@
         <a:spcBef>
           <a:spcPct val="20000"/>
         </a:spcBef>
-        <a:buFont typeface="Arial" pitchFamily="34" charset="0"/>
+        <a:buFont typeface="Helvetica" pitchFamily="34" charset="0"/>
         <a:buChar char="•"/>
         <a:defRPr sz="3200" kern="1200">
           <a:solidFill>
@@ -4426,7 +4426,7 @@
         <a:spcBef>
           <a:spcPct val="20000"/>
         </a:spcBef>
-        <a:buFont typeface="Arial" pitchFamily="34" charset="0"/>
+        <a:buFont typeface="Helvetica" pitchFamily="34" charset="0"/>
         <a:buChar char="–"/>
         <a:defRPr sz="2800" kern="1200">
           <a:solidFill>
@@ -4441,7 +4441,7 @@
         <a:spcBef>
           <a:spcPct val="20000"/>
         </a:spcBef>
-        <a:buFont typeface="Arial" pitchFamily="34" charset="0"/>
+        <a:buFont typeface="Helvetica" pitchFamily="34" charset="0"/>
         <a:buChar char="•"/>
         <a:defRPr sz="2400" kern="1200">
           <a:solidFill>
@@ -4456,7 +4456,7 @@
         <a:spcBef>
           <a:spcPct val="20000"/>
         </a:spcBef>
-        <a:buFont typeface="Arial" pitchFamily="34" charset="0"/>
+        <a:buFont typeface="Helvetica" pitchFamily="34" charset="0"/>
         <a:buChar char="–"/>
         <a:defRPr sz="2000" kern="1200">
           <a:solidFill>
@@ -4471,7 +4471,7 @@
         <a:spcBef>
           <a:spcPct val="20000"/>
         </a:spcBef>
-        <a:buFont typeface="Arial" pitchFamily="34" charset="0"/>
+        <a:buFont typeface="Helvetica" pitchFamily="34" charset="0"/>
         <a:buChar char="»"/>
         <a:defRPr sz="2000" kern="1200">
           <a:solidFill>
@@ -4486,7 +4486,7 @@
         <a:spcBef>
           <a:spcPct val="20000"/>
         </a:spcBef>
-        <a:buFont typeface="Arial" pitchFamily="34" charset="0"/>
+        <a:buFont typeface="Helvetica" pitchFamily="34" charset="0"/>
         <a:buChar char="•"/>
         <a:defRPr sz="2000" kern="1200">
           <a:solidFill>
@@ -4501,7 +4501,7 @@
         <a:spcBef>
           <a:spcPct val="20000"/>
         </a:spcBef>
-        <a:buFont typeface="Arial" pitchFamily="34" charset="0"/>
+        <a:buFont typeface="Helvetica" pitchFamily="34" charset="0"/>
         <a:buChar char="•"/>
         <a:defRPr sz="2000" kern="1200">
           <a:solidFill>
@@ -4516,7 +4516,7 @@
         <a:spcBef>
           <a:spcPct val="20000"/>
         </a:spcBef>
-        <a:buFont typeface="Arial" pitchFamily="34" charset="0"/>
+        <a:buFont typeface="Helvetica" pitchFamily="34" charset="0"/>
         <a:buChar char="•"/>
         <a:defRPr sz="2000" kern="1200">
           <a:solidFill>
@@ -4531,7 +4531,7 @@
         <a:spcBef>
           <a:spcPct val="20000"/>
         </a:spcBef>
-        <a:buFont typeface="Arial" pitchFamily="34" charset="0"/>
+        <a:buFont typeface="Helvetica" pitchFamily="34" charset="0"/>
         <a:buChar char="•"/>
         <a:defRPr sz="2000" kern="1200">
           <a:solidFill>
@@ -4728,9 +4728,9 @@
                 <a:solidFill>
                   <a:schemeClr val="bg2"/>
                 </a:solidFill>
-                <a:latin typeface="Cambria" pitchFamily="34" charset="0"/>
-                <a:ea typeface="Cambria" pitchFamily="34" charset="-122"/>
-                <a:cs typeface="Cambria" pitchFamily="34" charset="-120"/>
+                <a:latin typeface="Helvetica" pitchFamily="34" charset="0"/>
+                <a:ea typeface="Helvetica" pitchFamily="34" charset="-122"/>
+                <a:cs typeface="Helvetica" pitchFamily="34" charset="-120"/>
               </a:rPr>
               <a:t>Working together</a:t>
             </a:r>
@@ -4745,9 +4745,9 @@
                 <a:solidFill>
                   <a:schemeClr val="bg2"/>
                 </a:solidFill>
-                <a:latin typeface="Cambria" pitchFamily="34" charset="0"/>
-                <a:ea typeface="Cambria" pitchFamily="34" charset="-122"/>
-                <a:cs typeface="Cambria" pitchFamily="34" charset="-120"/>
+                <a:latin typeface="Helvetica" pitchFamily="34" charset="0"/>
+                <a:ea typeface="Helvetica" pitchFamily="34" charset="-122"/>
+                <a:cs typeface="Helvetica" pitchFamily="34" charset="-120"/>
               </a:rPr>
               <a:t>to win new clients</a:t>
             </a:r>
@@ -4925,9 +4925,9 @@
                 <a:solidFill>
                   <a:schemeClr val="tx1"/>
                 </a:solidFill>
-                <a:latin typeface="Cambria" pitchFamily="34" charset="0"/>
-                <a:ea typeface="Cambria" pitchFamily="34" charset="-122"/>
-                <a:cs typeface="Cambria" pitchFamily="34" charset="-120"/>
+                <a:latin typeface="Helvetica" pitchFamily="34" charset="0"/>
+                <a:ea typeface="Helvetica" pitchFamily="34" charset="-122"/>
+                <a:cs typeface="Helvetica" pitchFamily="34" charset="-120"/>
               </a:rPr>
               <a:t>A client gets four things</a:t>
             </a:r>
@@ -5040,11 +5040,11 @@
                 <a:solidFill>
                   <a:schemeClr val="tx1"/>
                 </a:solidFill>
-                <a:latin typeface="Cambria" pitchFamily="34" charset="0"/>
-                <a:ea typeface="Cambria" pitchFamily="34" charset="-122"/>
-                <a:cs typeface="Cambria" pitchFamily="34" charset="-120"/>
-              </a:rPr>
-              <a:t>1. Look credible</a:t>
+                <a:latin typeface="Helvetica" pitchFamily="34" charset="0"/>
+                <a:ea typeface="Helvetica" pitchFamily="34" charset="-122"/>
+                <a:cs typeface="Helvetica" pitchFamily="34" charset="-120"/>
+              </a:rPr>
+              <a:t>1. Credibility</a:t>
             </a:r>
             <a:endParaRPr lang="en-US" sz="2100" dirty="0"/>
           </a:p>
@@ -5227,11 +5227,11 @@
                 <a:solidFill>
                   <a:schemeClr val="tx1"/>
                 </a:solidFill>
-                <a:latin typeface="Cambria" pitchFamily="34" charset="0"/>
-                <a:ea typeface="Cambria" pitchFamily="34" charset="-122"/>
-                <a:cs typeface="Cambria" pitchFamily="34" charset="-120"/>
-              </a:rPr>
-              <a:t>2. Reach buyers</a:t>
+                <a:latin typeface="Helvetica" pitchFamily="34" charset="0"/>
+                <a:ea typeface="Helvetica" pitchFamily="34" charset="-122"/>
+                <a:cs typeface="Helvetica" pitchFamily="34" charset="-120"/>
+              </a:rPr>
+              <a:t>2. Outreach</a:t>
             </a:r>
             <a:endParaRPr lang="en-US" sz="2100" dirty="0"/>
           </a:p>
@@ -5414,11 +5414,11 @@
                 <a:solidFill>
                   <a:schemeClr val="tx1"/>
                 </a:solidFill>
-                <a:latin typeface="Cambria" pitchFamily="34" charset="0"/>
-                <a:ea typeface="Cambria" pitchFamily="34" charset="-122"/>
-                <a:cs typeface="Cambria" pitchFamily="34" charset="-120"/>
-              </a:rPr>
-              <a:t>3. Stay visible</a:t>
+                <a:latin typeface="Helvetica" pitchFamily="34" charset="0"/>
+                <a:ea typeface="Helvetica" pitchFamily="34" charset="-122"/>
+                <a:cs typeface="Helvetica" pitchFamily="34" charset="-120"/>
+              </a:rPr>
+              <a:t>3. Visibility</a:t>
             </a:r>
             <a:endParaRPr lang="en-US" sz="2100" dirty="0"/>
           </a:p>
@@ -5601,11 +5601,11 @@
                 <a:solidFill>
                   <a:schemeClr val="tx1"/>
                 </a:solidFill>
-                <a:latin typeface="Cambria" pitchFamily="34" charset="0"/>
-                <a:ea typeface="Cambria" pitchFamily="34" charset="-122"/>
-                <a:cs typeface="Cambria" pitchFamily="34" charset="-120"/>
-              </a:rPr>
-              <a:t>4. Track results</a:t>
+                <a:latin typeface="Helvetica" pitchFamily="34" charset="0"/>
+                <a:ea typeface="Helvetica" pitchFamily="34" charset="-122"/>
+                <a:cs typeface="Helvetica" pitchFamily="34" charset="-120"/>
+              </a:rPr>
+              <a:t>4. Results</a:t>
             </a:r>
             <a:endParaRPr lang="en-US" sz="2100" dirty="0"/>
           </a:p>
@@ -5822,11 +5822,11 @@
                 <a:solidFill>
                   <a:schemeClr val="tx1"/>
                 </a:solidFill>
-                <a:latin typeface="Cambria" pitchFamily="34" charset="0"/>
-                <a:ea typeface="Cambria" pitchFamily="34" charset="-122"/>
-                <a:cs typeface="Cambria" pitchFamily="34" charset="-120"/>
-              </a:rPr>
-              <a:t>How it works: the client spends about 2½ hours a week</a:t>
+                <a:latin typeface="Helvetica" pitchFamily="34" charset="0"/>
+                <a:ea typeface="Helvetica" pitchFamily="34" charset="-122"/>
+                <a:cs typeface="Helvetica" pitchFamily="34" charset="-120"/>
+              </a:rPr>
+              <a:t>How it works: 2½ hours a week from the client</a:t>
             </a:r>
             <a:endParaRPr lang="en-US" sz="3400" dirty="0"/>
           </a:p>
@@ -6674,9 +6674,9 @@
                 <a:solidFill>
                   <a:schemeClr val="tx1"/>
                 </a:solidFill>
-                <a:latin typeface="Cambria" pitchFamily="34" charset="0"/>
-                <a:ea typeface="Cambria" pitchFamily="34" charset="-122"/>
-                <a:cs typeface="Cambria" pitchFamily="34" charset="-120"/>
+                <a:latin typeface="Helvetica" pitchFamily="34" charset="0"/>
+                <a:ea typeface="Helvetica" pitchFamily="34" charset="-122"/>
+                <a:cs typeface="Helvetica" pitchFamily="34" charset="-120"/>
               </a:rPr>
               <a:t>What we expect it to produce each month</a:t>
             </a:r>
@@ -6875,9 +6875,9 @@
                 <a:solidFill>
                   <a:schemeClr val="tx1"/>
                 </a:solidFill>
-                <a:latin typeface="Cambria" pitchFamily="34" charset="0"/>
-                <a:ea typeface="Cambria" pitchFamily="34" charset="-122"/>
-                <a:cs typeface="Cambria" pitchFamily="34" charset="-120"/>
+                <a:latin typeface="Helvetica" pitchFamily="34" charset="0"/>
+                <a:ea typeface="Helvetica" pitchFamily="34" charset="-122"/>
+                <a:cs typeface="Helvetica" pitchFamily="34" charset="-120"/>
               </a:rPr>
               <a:t>Leads should build up month by month</a:t>
             </a:r>
@@ -6993,9 +6993,9 @@
                 <a:solidFill>
                   <a:schemeClr val="accent4"/>
                 </a:solidFill>
-                <a:latin typeface="Cambria" pitchFamily="34" charset="0"/>
-                <a:ea typeface="Cambria" pitchFamily="34" charset="-122"/>
-                <a:cs typeface="Cambria" pitchFamily="34" charset="-120"/>
+                <a:latin typeface="Helvetica" pitchFamily="34" charset="0"/>
+                <a:ea typeface="Helvetica" pitchFamily="34" charset="-122"/>
+                <a:cs typeface="Helvetica" pitchFamily="34" charset="-120"/>
               </a:rPr>
               <a:t>100</a:t>
             </a:r>
@@ -7068,9 +7068,9 @@
                 <a:solidFill>
                   <a:schemeClr val="accent4"/>
                 </a:solidFill>
-                <a:latin typeface="Cambria" pitchFamily="34" charset="0"/>
-                <a:ea typeface="Cambria" pitchFamily="34" charset="-122"/>
-                <a:cs typeface="Cambria" pitchFamily="34" charset="-120"/>
+                <a:latin typeface="Helvetica" pitchFamily="34" charset="0"/>
+                <a:ea typeface="Helvetica" pitchFamily="34" charset="-122"/>
+                <a:cs typeface="Helvetica" pitchFamily="34" charset="-120"/>
               </a:rPr>
               <a:t>10</a:t>
             </a:r>
@@ -7143,9 +7143,9 @@
                 <a:solidFill>
                   <a:schemeClr val="accent4"/>
                 </a:solidFill>
-                <a:latin typeface="Cambria" pitchFamily="34" charset="0"/>
-                <a:ea typeface="Cambria" pitchFamily="34" charset="-122"/>
-                <a:cs typeface="Cambria" pitchFamily="34" charset="-120"/>
+                <a:latin typeface="Helvetica" pitchFamily="34" charset="0"/>
+                <a:ea typeface="Helvetica" pitchFamily="34" charset="-122"/>
+                <a:cs typeface="Helvetica" pitchFamily="34" charset="-120"/>
               </a:rPr>
               <a:t>2–3</a:t>
             </a:r>
@@ -7364,9 +7364,9 @@
                 <a:solidFill>
                   <a:schemeClr val="tx1"/>
                 </a:solidFill>
-                <a:latin typeface="Cambria" pitchFamily="34" charset="0"/>
-                <a:ea typeface="Cambria" pitchFamily="34" charset="-122"/>
-                <a:cs typeface="Cambria" pitchFamily="34" charset="-120"/>
+                <a:latin typeface="Helvetica" pitchFamily="34" charset="0"/>
+                <a:ea typeface="Helvetica" pitchFamily="34" charset="-122"/>
+                <a:cs typeface="Helvetica" pitchFamily="34" charset="-120"/>
               </a:rPr>
               <a:t>What it costs: one monthly fee, every tool included</a:t>
             </a:r>
@@ -7466,9 +7466,9 @@
                 <a:solidFill>
                   <a:schemeClr val="accent1"/>
                 </a:solidFill>
-                <a:latin typeface="Cambria" pitchFamily="34" charset="0"/>
-                <a:ea typeface="Cambria" pitchFamily="34" charset="-122"/>
-                <a:cs typeface="Cambria" pitchFamily="34" charset="-120"/>
+                <a:latin typeface="Helvetica" pitchFamily="34" charset="0"/>
+                <a:ea typeface="Helvetica" pitchFamily="34" charset="-122"/>
+                <a:cs typeface="Helvetica" pitchFamily="34" charset="-120"/>
               </a:rPr>
               <a:t>£1,500</a:t>
             </a:r>
@@ -7604,9 +7604,9 @@
                 <a:solidFill>
                   <a:schemeClr val="accent1"/>
                 </a:solidFill>
-                <a:latin typeface="Cambria" pitchFamily="34" charset="0"/>
-                <a:ea typeface="Cambria" pitchFamily="34" charset="-122"/>
-                <a:cs typeface="Cambria" pitchFamily="34" charset="-120"/>
+                <a:latin typeface="Helvetica" pitchFamily="34" charset="0"/>
+                <a:ea typeface="Helvetica" pitchFamily="34" charset="-122"/>
+                <a:cs typeface="Helvetica" pitchFamily="34" charset="-120"/>
               </a:rPr>
               <a:t>£1,200</a:t>
             </a:r>
@@ -7742,9 +7742,9 @@
                 <a:solidFill>
                   <a:schemeClr val="bg2"/>
                 </a:solidFill>
-                <a:latin typeface="Cambria" pitchFamily="34" charset="0"/>
-                <a:ea typeface="Cambria" pitchFamily="34" charset="-122"/>
-                <a:cs typeface="Cambria" pitchFamily="34" charset="-120"/>
+                <a:latin typeface="Helvetica" pitchFamily="34" charset="0"/>
+                <a:ea typeface="Helvetica" pitchFamily="34" charset="-122"/>
+                <a:cs typeface="Helvetica" pitchFamily="34" charset="-120"/>
               </a:rPr>
               <a:t>£2,500</a:t>
             </a:r>
@@ -8012,9 +8012,9 @@
                 <a:solidFill>
                   <a:schemeClr val="tx1"/>
                 </a:solidFill>
-                <a:latin typeface="Cambria" pitchFamily="34" charset="0"/>
-                <a:ea typeface="Cambria" pitchFamily="34" charset="-122"/>
-                <a:cs typeface="Cambria" pitchFamily="34" charset="-120"/>
+                <a:latin typeface="Helvetica" pitchFamily="34" charset="0"/>
+                <a:ea typeface="Helvetica" pitchFamily="34" charset="-122"/>
+                <a:cs typeface="Helvetica" pitchFamily="34" charset="-120"/>
               </a:rPr>
               <a:t>One client win can pay for the whole year</a:t>
             </a:r>
@@ -8130,9 +8130,9 @@
                 <a:solidFill>
                   <a:schemeClr val="accent4"/>
                 </a:solidFill>
-                <a:latin typeface="Cambria" pitchFamily="34" charset="0"/>
-                <a:ea typeface="Cambria" pitchFamily="34" charset="-122"/>
-                <a:cs typeface="Cambria" pitchFamily="34" charset="-120"/>
+                <a:latin typeface="Helvetica" pitchFamily="34" charset="0"/>
+                <a:ea typeface="Helvetica" pitchFamily="34" charset="-122"/>
+                <a:cs typeface="Helvetica" pitchFamily="34" charset="-120"/>
               </a:rPr>
               <a:t>0.9×</a:t>
             </a:r>
@@ -8205,9 +8205,9 @@
                 <a:solidFill>
                   <a:schemeClr val="accent4"/>
                 </a:solidFill>
-                <a:latin typeface="Cambria" pitchFamily="34" charset="0"/>
-                <a:ea typeface="Cambria" pitchFamily="34" charset="-122"/>
-                <a:cs typeface="Cambria" pitchFamily="34" charset="-120"/>
+                <a:latin typeface="Helvetica" pitchFamily="34" charset="0"/>
+                <a:ea typeface="Helvetica" pitchFamily="34" charset="-122"/>
+                <a:cs typeface="Helvetica" pitchFamily="34" charset="-120"/>
               </a:rPr>
               <a:t>2.8×</a:t>
             </a:r>
@@ -8280,9 +8280,9 @@
                 <a:solidFill>
                   <a:schemeClr val="accent4"/>
                 </a:solidFill>
-                <a:latin typeface="Cambria" pitchFamily="34" charset="0"/>
-                <a:ea typeface="Cambria" pitchFamily="34" charset="-122"/>
-                <a:cs typeface="Cambria" pitchFamily="34" charset="-120"/>
+                <a:latin typeface="Helvetica" pitchFamily="34" charset="0"/>
+                <a:ea typeface="Helvetica" pitchFamily="34" charset="-122"/>
+                <a:cs typeface="Helvetica" pitchFamily="34" charset="-120"/>
               </a:rPr>
               <a:t>9.5×</a:t>
             </a:r>
@@ -8463,9 +8463,9 @@
                 <a:solidFill>
                   <a:schemeClr val="accent3"/>
                 </a:solidFill>
-                <a:latin typeface="Cambria" pitchFamily="34" charset="0"/>
-                <a:ea typeface="Cambria" pitchFamily="34" charset="-122"/>
-                <a:cs typeface="Cambria" pitchFamily="34" charset="-120"/>
+                <a:latin typeface="Helvetica" pitchFamily="34" charset="0"/>
+                <a:ea typeface="Helvetica" pitchFamily="34" charset="-122"/>
+                <a:cs typeface="Helvetica" pitchFamily="34" charset="-120"/>
               </a:rPr>
               <a:t>04</a:t>
             </a:r>
@@ -8504,9 +8504,9 @@
                 <a:solidFill>
                   <a:schemeClr val="bg2"/>
                 </a:solidFill>
-                <a:latin typeface="Cambria" pitchFamily="34" charset="0"/>
-                <a:ea typeface="Cambria" pitchFamily="34" charset="-122"/>
-                <a:cs typeface="Cambria" pitchFamily="34" charset="-120"/>
+                <a:latin typeface="Helvetica" pitchFamily="34" charset="0"/>
+                <a:ea typeface="Helvetica" pitchFamily="34" charset="-122"/>
+                <a:cs typeface="Helvetica" pitchFamily="34" charset="-120"/>
               </a:rPr>
               <a:t>Your role</a:t>
             </a:r>
@@ -8691,9 +8691,9 @@
                 <a:solidFill>
                   <a:schemeClr val="tx1"/>
                 </a:solidFill>
-                <a:latin typeface="Cambria" pitchFamily="34" charset="0"/>
-                <a:ea typeface="Cambria" pitchFamily="34" charset="-122"/>
-                <a:cs typeface="Cambria" pitchFamily="34" charset="-120"/>
+                <a:latin typeface="Helvetica" pitchFamily="34" charset="0"/>
+                <a:ea typeface="Helvetica" pitchFamily="34" charset="-122"/>
+                <a:cs typeface="Helvetica" pitchFamily="34" charset="-120"/>
               </a:rPr>
               <a:t>Three ways you can help us grow</a:t>
             </a:r>
@@ -8806,9 +8806,9 @@
                 <a:solidFill>
                   <a:schemeClr val="tx1"/>
                 </a:solidFill>
-                <a:latin typeface="Cambria" pitchFamily="34" charset="0"/>
-                <a:ea typeface="Cambria" pitchFamily="34" charset="-122"/>
-                <a:cs typeface="Cambria" pitchFamily="34" charset="-120"/>
+                <a:latin typeface="Helvetica" pitchFamily="34" charset="0"/>
+                <a:ea typeface="Helvetica" pitchFamily="34" charset="-122"/>
+                <a:cs typeface="Helvetica" pitchFamily="34" charset="-120"/>
               </a:rPr>
               <a:t>Advise</a:t>
             </a:r>
@@ -8957,9 +8957,9 @@
                 <a:solidFill>
                   <a:schemeClr val="tx1"/>
                 </a:solidFill>
-                <a:latin typeface="Cambria" pitchFamily="34" charset="0"/>
-                <a:ea typeface="Cambria" pitchFamily="34" charset="-122"/>
-                <a:cs typeface="Cambria" pitchFamily="34" charset="-120"/>
+                <a:latin typeface="Helvetica" pitchFamily="34" charset="0"/>
+                <a:ea typeface="Helvetica" pitchFamily="34" charset="-122"/>
+                <a:cs typeface="Helvetica" pitchFamily="34" charset="-120"/>
               </a:rPr>
               <a:t>Guide</a:t>
             </a:r>
@@ -9108,9 +9108,9 @@
                 <a:solidFill>
                   <a:schemeClr val="bg2"/>
                 </a:solidFill>
-                <a:latin typeface="Cambria" pitchFamily="34" charset="0"/>
-                <a:ea typeface="Cambria" pitchFamily="34" charset="-122"/>
-                <a:cs typeface="Cambria" pitchFamily="34" charset="-120"/>
+                <a:latin typeface="Helvetica" pitchFamily="34" charset="0"/>
+                <a:ea typeface="Helvetica" pitchFamily="34" charset="-122"/>
+                <a:cs typeface="Helvetica" pitchFamily="34" charset="-120"/>
               </a:rPr>
               <a:t>Introduce</a:t>
             </a:r>
@@ -9293,9 +9293,9 @@
                 <a:solidFill>
                   <a:schemeClr val="tx1"/>
                 </a:solidFill>
-                <a:latin typeface="Cambria" pitchFamily="34" charset="0"/>
-                <a:ea typeface="Cambria" pitchFamily="34" charset="-122"/>
-                <a:cs typeface="Cambria" pitchFamily="34" charset="-120"/>
+                <a:latin typeface="Helvetica" pitchFamily="34" charset="0"/>
+                <a:ea typeface="Helvetica" pitchFamily="34" charset="-122"/>
+                <a:cs typeface="Helvetica" pitchFamily="34" charset="-120"/>
               </a:rPr>
               <a:t>Where your experience matters most</a:t>
             </a:r>
@@ -9359,9 +9359,9 @@
                 <a:solidFill>
                   <a:schemeClr val="tx1"/>
                 </a:solidFill>
-                <a:latin typeface="Cambria" pitchFamily="34" charset="0"/>
-                <a:ea typeface="Cambria" pitchFamily="34" charset="-122"/>
-                <a:cs typeface="Cambria" pitchFamily="34" charset="-120"/>
+                <a:latin typeface="Helvetica" pitchFamily="34" charset="0"/>
+                <a:ea typeface="Helvetica" pitchFamily="34" charset="-122"/>
+                <a:cs typeface="Helvetica" pitchFamily="34" charset="-120"/>
               </a:rPr>
               <a:t>Proof</a:t>
             </a:r>
@@ -9399,7 +9399,7 @@
                   <a:schemeClr val="tx2"/>
                 </a:solidFill>
               </a:rPr>
-              <a:t>We don’t yet have a case study with hard numbers.</a:t>
+              <a:t>No case study with hard numbers yet.</a:t>
             </a:r>
             <a:endParaRPr lang="en-US" sz="1700" dirty="0"/>
           </a:p>
@@ -9497,9 +9497,9 @@
                 <a:solidFill>
                   <a:schemeClr val="tx1"/>
                 </a:solidFill>
-                <a:latin typeface="Cambria" pitchFamily="34" charset="0"/>
-                <a:ea typeface="Cambria" pitchFamily="34" charset="-122"/>
-                <a:cs typeface="Cambria" pitchFamily="34" charset="-120"/>
+                <a:latin typeface="Helvetica" pitchFamily="34" charset="0"/>
+                <a:ea typeface="Helvetica" pitchFamily="34" charset="-122"/>
+                <a:cs typeface="Helvetica" pitchFamily="34" charset="-120"/>
               </a:rPr>
               <a:t>Focus</a:t>
             </a:r>
@@ -9635,9 +9635,9 @@
                 <a:solidFill>
                   <a:schemeClr val="tx1"/>
                 </a:solidFill>
-                <a:latin typeface="Cambria" pitchFamily="34" charset="0"/>
-                <a:ea typeface="Cambria" pitchFamily="34" charset="-122"/>
-                <a:cs typeface="Cambria" pitchFamily="34" charset="-120"/>
+                <a:latin typeface="Helvetica" pitchFamily="34" charset="0"/>
+                <a:ea typeface="Helvetica" pitchFamily="34" charset="-122"/>
+                <a:cs typeface="Helvetica" pitchFamily="34" charset="-120"/>
               </a:rPr>
               <a:t>Pricing</a:t>
             </a:r>
@@ -9773,9 +9773,9 @@
                 <a:solidFill>
                   <a:schemeClr val="tx1"/>
                 </a:solidFill>
-                <a:latin typeface="Cambria" pitchFamily="34" charset="0"/>
-                <a:ea typeface="Cambria" pitchFamily="34" charset="-122"/>
-                <a:cs typeface="Cambria" pitchFamily="34" charset="-120"/>
+                <a:latin typeface="Helvetica" pitchFamily="34" charset="0"/>
+                <a:ea typeface="Helvetica" pitchFamily="34" charset="-122"/>
+                <a:cs typeface="Helvetica" pitchFamily="34" charset="-120"/>
               </a:rPr>
               <a:t>Growth</a:t>
             </a:r>
@@ -9994,9 +9994,9 @@
                 <a:solidFill>
                   <a:schemeClr val="tx1"/>
                 </a:solidFill>
-                <a:latin typeface="Cambria" pitchFamily="34" charset="0"/>
-                <a:ea typeface="Cambria" pitchFamily="34" charset="-122"/>
-                <a:cs typeface="Cambria" pitchFamily="34" charset="-120"/>
+                <a:latin typeface="Helvetica" pitchFamily="34" charset="0"/>
+                <a:ea typeface="Helvetica" pitchFamily="34" charset="-122"/>
+                <a:cs typeface="Helvetica" pitchFamily="34" charset="-120"/>
               </a:rPr>
               <a:t>How we could work together: three options</a:t>
             </a:r>
@@ -10145,9 +10145,9 @@
                 <a:solidFill>
                   <a:schemeClr val="bg2"/>
                 </a:solidFill>
-                <a:latin typeface="Cambria" pitchFamily="34" charset="0"/>
-                <a:ea typeface="Cambria" pitchFamily="34" charset="-122"/>
-                <a:cs typeface="Cambria" pitchFamily="34" charset="-120"/>
+                <a:latin typeface="Helvetica" pitchFamily="34" charset="0"/>
+                <a:ea typeface="Helvetica" pitchFamily="34" charset="-122"/>
+                <a:cs typeface="Helvetica" pitchFamily="34" charset="-120"/>
               </a:rPr>
               <a:t>A. Referral partner</a:t>
             </a:r>
@@ -10296,9 +10296,9 @@
                 <a:solidFill>
                   <a:schemeClr val="tx1"/>
                 </a:solidFill>
-                <a:latin typeface="Cambria" pitchFamily="34" charset="0"/>
-                <a:ea typeface="Cambria" pitchFamily="34" charset="-122"/>
-                <a:cs typeface="Cambria" pitchFamily="34" charset="-120"/>
+                <a:latin typeface="Helvetica" pitchFamily="34" charset="0"/>
+                <a:ea typeface="Helvetica" pitchFamily="34" charset="-122"/>
+                <a:cs typeface="Helvetica" pitchFamily="34" charset="-120"/>
               </a:rPr>
               <a:t>B. Advisor</a:t>
             </a:r>
@@ -10447,9 +10447,9 @@
                 <a:solidFill>
                   <a:schemeClr val="tx1"/>
                 </a:solidFill>
-                <a:latin typeface="Cambria" pitchFamily="34" charset="0"/>
-                <a:ea typeface="Cambria" pitchFamily="34" charset="-122"/>
-                <a:cs typeface="Cambria" pitchFamily="34" charset="-120"/>
+                <a:latin typeface="Helvetica" pitchFamily="34" charset="0"/>
+                <a:ea typeface="Helvetica" pitchFamily="34" charset="-122"/>
+                <a:cs typeface="Helvetica" pitchFamily="34" charset="-120"/>
               </a:rPr>
               <a:t>C. Strategic advisor</a:t>
             </a:r>
@@ -10668,9 +10668,9 @@
                 <a:solidFill>
                   <a:schemeClr val="tx1"/>
                 </a:solidFill>
-                <a:latin typeface="Cambria" pitchFamily="34" charset="0"/>
-                <a:ea typeface="Cambria" pitchFamily="34" charset="-122"/>
-                <a:cs typeface="Cambria" pitchFamily="34" charset="-120"/>
+                <a:latin typeface="Helvetica" pitchFamily="34" charset="0"/>
+                <a:ea typeface="Helvetica" pitchFamily="34" charset="-122"/>
+                <a:cs typeface="Helvetica" pitchFamily="34" charset="-120"/>
               </a:rPr>
               <a:t>Four questions, answered in order</a:t>
             </a:r>
@@ -10732,9 +10732,9 @@
                 <a:solidFill>
                   <a:schemeClr val="bg1"/>
                 </a:solidFill>
-                <a:latin typeface="Cambria" pitchFamily="34" charset="0"/>
-                <a:ea typeface="Cambria" pitchFamily="34" charset="-122"/>
-                <a:cs typeface="Cambria" pitchFamily="34" charset="-120"/>
+                <a:latin typeface="Helvetica" pitchFamily="34" charset="0"/>
+                <a:ea typeface="Helvetica" pitchFamily="34" charset="-122"/>
+                <a:cs typeface="Helvetica" pitchFamily="34" charset="-120"/>
               </a:rPr>
               <a:t>1</a:t>
             </a:r>
@@ -10771,9 +10771,9 @@
                 <a:solidFill>
                   <a:schemeClr val="tx1"/>
                 </a:solidFill>
-                <a:latin typeface="Cambria" pitchFamily="34" charset="0"/>
-                <a:ea typeface="Cambria" pitchFamily="34" charset="-122"/>
-                <a:cs typeface="Cambria" pitchFamily="34" charset="-120"/>
+                <a:latin typeface="Helvetica" pitchFamily="34" charset="0"/>
+                <a:ea typeface="Helvetica" pitchFamily="34" charset="-122"/>
+                <a:cs typeface="Helvetica" pitchFamily="34" charset="-120"/>
               </a:rPr>
               <a:t>Who we are</a:t>
             </a:r>
@@ -10871,9 +10871,9 @@
                 <a:solidFill>
                   <a:schemeClr val="bg1"/>
                 </a:solidFill>
-                <a:latin typeface="Cambria" pitchFamily="34" charset="0"/>
-                <a:ea typeface="Cambria" pitchFamily="34" charset="-122"/>
-                <a:cs typeface="Cambria" pitchFamily="34" charset="-120"/>
+                <a:latin typeface="Helvetica" pitchFamily="34" charset="0"/>
+                <a:ea typeface="Helvetica" pitchFamily="34" charset="-122"/>
+                <a:cs typeface="Helvetica" pitchFamily="34" charset="-120"/>
               </a:rPr>
               <a:t>2</a:t>
             </a:r>
@@ -10910,9 +10910,9 @@
                 <a:solidFill>
                   <a:schemeClr val="tx1"/>
                 </a:solidFill>
-                <a:latin typeface="Cambria" pitchFamily="34" charset="0"/>
-                <a:ea typeface="Cambria" pitchFamily="34" charset="-122"/>
-                <a:cs typeface="Cambria" pitchFamily="34" charset="-120"/>
+                <a:latin typeface="Helvetica" pitchFamily="34" charset="0"/>
+                <a:ea typeface="Helvetica" pitchFamily="34" charset="-122"/>
+                <a:cs typeface="Helvetica" pitchFamily="34" charset="-120"/>
               </a:rPr>
               <a:t>What we’ve done</a:t>
             </a:r>
@@ -11010,9 +11010,9 @@
                 <a:solidFill>
                   <a:schemeClr val="bg1"/>
                 </a:solidFill>
-                <a:latin typeface="Cambria" pitchFamily="34" charset="0"/>
-                <a:ea typeface="Cambria" pitchFamily="34" charset="-122"/>
-                <a:cs typeface="Cambria" pitchFamily="34" charset="-120"/>
+                <a:latin typeface="Helvetica" pitchFamily="34" charset="0"/>
+                <a:ea typeface="Helvetica" pitchFamily="34" charset="-122"/>
+                <a:cs typeface="Helvetica" pitchFamily="34" charset="-120"/>
               </a:rPr>
               <a:t>3</a:t>
             </a:r>
@@ -11049,9 +11049,9 @@
                 <a:solidFill>
                   <a:schemeClr val="tx1"/>
                 </a:solidFill>
-                <a:latin typeface="Cambria" pitchFamily="34" charset="0"/>
-                <a:ea typeface="Cambria" pitchFamily="34" charset="-122"/>
-                <a:cs typeface="Cambria" pitchFamily="34" charset="-120"/>
+                <a:latin typeface="Helvetica" pitchFamily="34" charset="0"/>
+                <a:ea typeface="Helvetica" pitchFamily="34" charset="-122"/>
+                <a:cs typeface="Helvetica" pitchFamily="34" charset="-120"/>
               </a:rPr>
               <a:t>What we offer</a:t>
             </a:r>
@@ -11149,9 +11149,9 @@
                 <a:solidFill>
                   <a:schemeClr val="bg1"/>
                 </a:solidFill>
-                <a:latin typeface="Cambria" pitchFamily="34" charset="0"/>
-                <a:ea typeface="Cambria" pitchFamily="34" charset="-122"/>
-                <a:cs typeface="Cambria" pitchFamily="34" charset="-120"/>
+                <a:latin typeface="Helvetica" pitchFamily="34" charset="0"/>
+                <a:ea typeface="Helvetica" pitchFamily="34" charset="-122"/>
+                <a:cs typeface="Helvetica" pitchFamily="34" charset="-120"/>
               </a:rPr>
               <a:t>4</a:t>
             </a:r>
@@ -11188,9 +11188,9 @@
                 <a:solidFill>
                   <a:schemeClr val="tx1"/>
                 </a:solidFill>
-                <a:latin typeface="Cambria" pitchFamily="34" charset="0"/>
-                <a:ea typeface="Cambria" pitchFamily="34" charset="-122"/>
-                <a:cs typeface="Cambria" pitchFamily="34" charset="-120"/>
+                <a:latin typeface="Helvetica" pitchFamily="34" charset="0"/>
+                <a:ea typeface="Helvetica" pitchFamily="34" charset="-122"/>
+                <a:cs typeface="Helvetica" pitchFamily="34" charset="-120"/>
               </a:rPr>
               <a:t>Your role</a:t>
             </a:r>
@@ -11373,9 +11373,9 @@
                 <a:solidFill>
                   <a:schemeClr val="tx1"/>
                 </a:solidFill>
-                <a:latin typeface="Cambria" pitchFamily="34" charset="0"/>
-                <a:ea typeface="Cambria" pitchFamily="34" charset="-122"/>
-                <a:cs typeface="Cambria" pitchFamily="34" charset="-120"/>
+                <a:latin typeface="Helvetica" pitchFamily="34" charset="0"/>
+                <a:ea typeface="Helvetica" pitchFamily="34" charset="-122"/>
+                <a:cs typeface="Helvetica" pitchFamily="34" charset="-120"/>
               </a:rPr>
               <a:t>The first 90 days together</a:t>
             </a:r>
@@ -11496,9 +11496,9 @@
                 <a:solidFill>
                   <a:schemeClr val="tx1"/>
                 </a:solidFill>
-                <a:latin typeface="Cambria" pitchFamily="34" charset="0"/>
-                <a:ea typeface="Cambria" pitchFamily="34" charset="-122"/>
-                <a:cs typeface="Cambria" pitchFamily="34" charset="-120"/>
+                <a:latin typeface="Helvetica" pitchFamily="34" charset="0"/>
+                <a:ea typeface="Helvetica" pitchFamily="34" charset="-122"/>
+                <a:cs typeface="Helvetica" pitchFamily="34" charset="-120"/>
               </a:rPr>
               <a:t>Agree the role and terms</a:t>
             </a:r>
@@ -11596,9 +11596,9 @@
                 <a:solidFill>
                   <a:schemeClr val="tx1"/>
                 </a:solidFill>
-                <a:latin typeface="Cambria" pitchFamily="34" charset="0"/>
-                <a:ea typeface="Cambria" pitchFamily="34" charset="-122"/>
-                <a:cs typeface="Cambria" pitchFamily="34" charset="-120"/>
+                <a:latin typeface="Helvetica" pitchFamily="34" charset="0"/>
+                <a:ea typeface="Helvetica" pitchFamily="34" charset="-122"/>
+                <a:cs typeface="Helvetica" pitchFamily="34" charset="-120"/>
               </a:rPr>
               <a:t>Choose one market and list 10 people to introduce</a:t>
             </a:r>
@@ -11696,9 +11696,9 @@
                 <a:solidFill>
                   <a:schemeClr val="tx1"/>
                 </a:solidFill>
-                <a:latin typeface="Cambria" pitchFamily="34" charset="0"/>
-                <a:ea typeface="Cambria" pitchFamily="34" charset="-122"/>
-                <a:cs typeface="Cambria" pitchFamily="34" charset="-120"/>
+                <a:latin typeface="Helvetica" pitchFamily="34" charset="0"/>
+                <a:ea typeface="Helvetica" pitchFamily="34" charset="-122"/>
+                <a:cs typeface="Helvetica" pitchFamily="34" charset="-120"/>
               </a:rPr>
               <a:t>First introductions and calls</a:t>
             </a:r>
@@ -11796,9 +11796,9 @@
                 <a:solidFill>
                   <a:schemeClr val="tx1"/>
                 </a:solidFill>
-                <a:latin typeface="Cambria" pitchFamily="34" charset="0"/>
-                <a:ea typeface="Cambria" pitchFamily="34" charset="-122"/>
-                <a:cs typeface="Cambria" pitchFamily="34" charset="-120"/>
+                <a:latin typeface="Helvetica" pitchFamily="34" charset="0"/>
+                <a:ea typeface="Helvetica" pitchFamily="34" charset="-122"/>
+                <a:cs typeface="Helvetica" pitchFamily="34" charset="-120"/>
               </a:rPr>
               <a:t>First new client, then review</a:t>
             </a:r>
@@ -12008,9 +12008,9 @@
                 <a:solidFill>
                   <a:schemeClr val="bg2"/>
                 </a:solidFill>
-                <a:latin typeface="Cambria" pitchFamily="34" charset="0"/>
-                <a:ea typeface="Cambria" pitchFamily="34" charset="-122"/>
-                <a:cs typeface="Cambria" pitchFamily="34" charset="-120"/>
+                <a:latin typeface="Helvetica" pitchFamily="34" charset="0"/>
+                <a:ea typeface="Helvetica" pitchFamily="34" charset="-122"/>
+                <a:cs typeface="Helvetica" pitchFamily="34" charset="-120"/>
               </a:rPr>
               <a:t>You know the people.</a:t>
             </a:r>
@@ -12025,9 +12025,9 @@
                 <a:solidFill>
                   <a:schemeClr val="bg2"/>
                 </a:solidFill>
-                <a:latin typeface="Cambria" pitchFamily="34" charset="0"/>
-                <a:ea typeface="Cambria" pitchFamily="34" charset="-122"/>
-                <a:cs typeface="Cambria" pitchFamily="34" charset="-120"/>
+                <a:latin typeface="Helvetica" pitchFamily="34" charset="0"/>
+                <a:ea typeface="Helvetica" pitchFamily="34" charset="-122"/>
+                <a:cs typeface="Helvetica" pitchFamily="34" charset="-120"/>
               </a:rPr>
               <a:t>We build the system.</a:t>
             </a:r>
@@ -12167,9 +12167,9 @@
                 <a:solidFill>
                   <a:schemeClr val="accent3"/>
                 </a:solidFill>
-                <a:latin typeface="Cambria" pitchFamily="34" charset="0"/>
-                <a:ea typeface="Cambria" pitchFamily="34" charset="-122"/>
-                <a:cs typeface="Cambria" pitchFamily="34" charset="-120"/>
+                <a:latin typeface="Helvetica" pitchFamily="34" charset="0"/>
+                <a:ea typeface="Helvetica" pitchFamily="34" charset="-122"/>
+                <a:cs typeface="Helvetica" pitchFamily="34" charset="-120"/>
               </a:rPr>
               <a:t>01</a:t>
             </a:r>
@@ -12208,9 +12208,9 @@
                 <a:solidFill>
                   <a:schemeClr val="bg2"/>
                 </a:solidFill>
-                <a:latin typeface="Cambria" pitchFamily="34" charset="0"/>
-                <a:ea typeface="Cambria" pitchFamily="34" charset="-122"/>
-                <a:cs typeface="Cambria" pitchFamily="34" charset="-120"/>
+                <a:latin typeface="Helvetica" pitchFamily="34" charset="0"/>
+                <a:ea typeface="Helvetica" pitchFamily="34" charset="-122"/>
+                <a:cs typeface="Helvetica" pitchFamily="34" charset="-120"/>
               </a:rPr>
               <a:t>Who we are</a:t>
             </a:r>
@@ -12395,9 +12395,9 @@
                 <a:solidFill>
                   <a:schemeClr val="tx1"/>
                 </a:solidFill>
-                <a:latin typeface="Cambria" pitchFamily="34" charset="0"/>
-                <a:ea typeface="Cambria" pitchFamily="34" charset="-122"/>
-                <a:cs typeface="Cambria" pitchFamily="34" charset="-120"/>
+                <a:latin typeface="Helvetica" pitchFamily="34" charset="0"/>
+                <a:ea typeface="Helvetica" pitchFamily="34" charset="-122"/>
+                <a:cs typeface="Helvetica" pitchFamily="34" charset="-120"/>
               </a:rPr>
               <a:t>We help experts win clients, without using their time</a:t>
             </a:r>
@@ -12510,9 +12510,9 @@
                 <a:solidFill>
                   <a:schemeClr val="tx1"/>
                 </a:solidFill>
-                <a:latin typeface="Cambria" pitchFamily="34" charset="0"/>
-                <a:ea typeface="Cambria" pitchFamily="34" charset="-122"/>
-                <a:cs typeface="Cambria" pitchFamily="34" charset="-120"/>
+                <a:latin typeface="Helvetica" pitchFamily="34" charset="0"/>
+                <a:ea typeface="Helvetica" pitchFamily="34" charset="-122"/>
+                <a:cs typeface="Helvetica" pitchFamily="34" charset="-120"/>
               </a:rPr>
               <a:t>What we do</a:t>
             </a:r>
@@ -12661,9 +12661,9 @@
                 <a:solidFill>
                   <a:schemeClr val="tx1"/>
                 </a:solidFill>
-                <a:latin typeface="Cambria" pitchFamily="34" charset="0"/>
-                <a:ea typeface="Cambria" pitchFamily="34" charset="-122"/>
-                <a:cs typeface="Cambria" pitchFamily="34" charset="-120"/>
+                <a:latin typeface="Helvetica" pitchFamily="34" charset="0"/>
+                <a:ea typeface="Helvetica" pitchFamily="34" charset="-122"/>
+                <a:cs typeface="Helvetica" pitchFamily="34" charset="-120"/>
               </a:rPr>
               <a:t>Who we are</a:t>
             </a:r>
@@ -12826,9 +12826,9 @@
                 <a:solidFill>
                   <a:schemeClr val="tx1"/>
                 </a:solidFill>
-                <a:latin typeface="Cambria" pitchFamily="34" charset="0"/>
-                <a:ea typeface="Cambria" pitchFamily="34" charset="-122"/>
-                <a:cs typeface="Cambria" pitchFamily="34" charset="-120"/>
+                <a:latin typeface="Helvetica" pitchFamily="34" charset="0"/>
+                <a:ea typeface="Helvetica" pitchFamily="34" charset="-122"/>
+                <a:cs typeface="Helvetica" pitchFamily="34" charset="-120"/>
               </a:rPr>
               <a:t>How we work</a:t>
             </a:r>
@@ -13011,9 +13011,9 @@
                 <a:solidFill>
                   <a:schemeClr val="tx1"/>
                 </a:solidFill>
-                <a:latin typeface="Cambria" pitchFamily="34" charset="0"/>
-                <a:ea typeface="Cambria" pitchFamily="34" charset="-122"/>
-                <a:cs typeface="Cambria" pitchFamily="34" charset="-120"/>
+                <a:latin typeface="Helvetica" pitchFamily="34" charset="0"/>
+                <a:ea typeface="Helvetica" pitchFamily="34" charset="-122"/>
+                <a:cs typeface="Helvetica" pitchFamily="34" charset="-120"/>
               </a:rPr>
               <a:t>The problem: buyers don’t know great experts exist</a:t>
             </a:r>
@@ -13126,9 +13126,9 @@
                 <a:solidFill>
                   <a:schemeClr val="tx1"/>
                 </a:solidFill>
-                <a:latin typeface="Cambria" pitchFamily="34" charset="0"/>
-                <a:ea typeface="Cambria" pitchFamily="34" charset="-122"/>
-                <a:cs typeface="Cambria" pitchFamily="34" charset="-120"/>
+                <a:latin typeface="Helvetica" pitchFamily="34" charset="0"/>
+                <a:ea typeface="Helvetica" pitchFamily="34" charset="-122"/>
+                <a:cs typeface="Helvetica" pitchFamily="34" charset="-120"/>
               </a:rPr>
               <a:t>No time</a:t>
             </a:r>
@@ -13277,9 +13277,9 @@
                 <a:solidFill>
                   <a:schemeClr val="tx1"/>
                 </a:solidFill>
-                <a:latin typeface="Cambria" pitchFamily="34" charset="0"/>
-                <a:ea typeface="Cambria" pitchFamily="34" charset="-122"/>
-                <a:cs typeface="Cambria" pitchFamily="34" charset="-120"/>
+                <a:latin typeface="Helvetica" pitchFamily="34" charset="0"/>
+                <a:ea typeface="Helvetica" pitchFamily="34" charset="-122"/>
+                <a:cs typeface="Helvetica" pitchFamily="34" charset="-120"/>
               </a:rPr>
               <a:t>No system</a:t>
             </a:r>
@@ -13428,9 +13428,9 @@
                 <a:solidFill>
                   <a:schemeClr val="tx1"/>
                 </a:solidFill>
-                <a:latin typeface="Cambria" pitchFamily="34" charset="0"/>
-                <a:ea typeface="Cambria" pitchFamily="34" charset="-122"/>
-                <a:cs typeface="Cambria" pitchFamily="34" charset="-120"/>
+                <a:latin typeface="Helvetica" pitchFamily="34" charset="0"/>
+                <a:ea typeface="Helvetica" pitchFamily="34" charset="-122"/>
+                <a:cs typeface="Helvetica" pitchFamily="34" charset="-120"/>
               </a:rPr>
               <a:t>Too much noise</a:t>
             </a:r>
@@ -13649,9 +13649,9 @@
                 <a:solidFill>
                   <a:schemeClr val="tx1"/>
                 </a:solidFill>
-                <a:latin typeface="Cambria" pitchFamily="34" charset="0"/>
-                <a:ea typeface="Cambria" pitchFamily="34" charset="-122"/>
-                <a:cs typeface="Cambria" pitchFamily="34" charset="-120"/>
+                <a:latin typeface="Helvetica" pitchFamily="34" charset="0"/>
+                <a:ea typeface="Helvetica" pitchFamily="34" charset="-122"/>
+                <a:cs typeface="Helvetica" pitchFamily="34" charset="-120"/>
               </a:rPr>
               <a:t>The audit shows it: real stories get 6× more attention</a:t>
             </a:r>
@@ -13828,9 +13828,9 @@
                 <a:solidFill>
                   <a:schemeClr val="accent3"/>
                 </a:solidFill>
-                <a:latin typeface="Cambria" pitchFamily="34" charset="0"/>
-                <a:ea typeface="Cambria" pitchFamily="34" charset="-122"/>
-                <a:cs typeface="Cambria" pitchFamily="34" charset="-120"/>
+                <a:latin typeface="Helvetica" pitchFamily="34" charset="0"/>
+                <a:ea typeface="Helvetica" pitchFamily="34" charset="-122"/>
+                <a:cs typeface="Helvetica" pitchFamily="34" charset="-120"/>
               </a:rPr>
               <a:t>02</a:t>
             </a:r>
@@ -13869,9 +13869,9 @@
                 <a:solidFill>
                   <a:schemeClr val="bg2"/>
                 </a:solidFill>
-                <a:latin typeface="Cambria" pitchFamily="34" charset="0"/>
-                <a:ea typeface="Cambria" pitchFamily="34" charset="-122"/>
-                <a:cs typeface="Cambria" pitchFamily="34" charset="-120"/>
+                <a:latin typeface="Helvetica" pitchFamily="34" charset="0"/>
+                <a:ea typeface="Helvetica" pitchFamily="34" charset="-122"/>
+                <a:cs typeface="Helvetica" pitchFamily="34" charset="-120"/>
               </a:rPr>
               <a:t>What we’ve done</a:t>
             </a:r>
@@ -14056,9 +14056,9 @@
                 <a:solidFill>
                   <a:schemeClr val="tx1"/>
                 </a:solidFill>
-                <a:latin typeface="Cambria" pitchFamily="34" charset="0"/>
-                <a:ea typeface="Cambria" pitchFamily="34" charset="-122"/>
-                <a:cs typeface="Cambria" pitchFamily="34" charset="-120"/>
+                <a:latin typeface="Helvetica" pitchFamily="34" charset="0"/>
+                <a:ea typeface="Helvetica" pitchFamily="34" charset="-122"/>
+                <a:cs typeface="Helvetica" pitchFamily="34" charset="-120"/>
               </a:rPr>
               <a:t>Three clients, three different markets, one method</a:t>
             </a:r>
@@ -14107,16 +14107,16 @@
                           <a:solidFill>
                             <a:schemeClr val="bg1"/>
                           </a:solidFill>
-                          <a:latin typeface="Cambria" pitchFamily="34" charset="0"/>
-                          <a:ea typeface="Cambria" pitchFamily="34" charset="-122"/>
-                          <a:cs typeface="Cambria" pitchFamily="34" charset="-120"/>
+                          <a:latin typeface="Helvetica" pitchFamily="34" charset="0"/>
+                          <a:ea typeface="Helvetica" pitchFamily="34" charset="-122"/>
+                          <a:cs typeface="Helvetica" pitchFamily="34" charset="-120"/>
                         </a:rPr>
                         <a:t>Client</a:t>
                       </a:r>
                       <a:endParaRPr lang="en-US" sz="1600" dirty="0">
-                        <a:latin typeface="Cambria" charset="0"/>
-                        <a:ea typeface="Cambria" charset="0"/>
-                        <a:cs typeface="Cambria" charset="0"/>
+                        <a:latin typeface="Helvetica" charset="0"/>
+                        <a:ea typeface="Helvetica" charset="0"/>
+                        <a:cs typeface="Helvetica" charset="0"/>
                       </a:endParaRPr>
                     </a:p>
                   </a:txBody>
@@ -14175,16 +14175,16 @@
                           <a:solidFill>
                             <a:schemeClr val="bg1"/>
                           </a:solidFill>
-                          <a:latin typeface="Cambria" pitchFamily="34" charset="0"/>
-                          <a:ea typeface="Cambria" pitchFamily="34" charset="-122"/>
-                          <a:cs typeface="Cambria" pitchFamily="34" charset="-120"/>
+                          <a:latin typeface="Helvetica" pitchFamily="34" charset="0"/>
+                          <a:ea typeface="Helvetica" pitchFamily="34" charset="-122"/>
+                          <a:cs typeface="Helvetica" pitchFamily="34" charset="-120"/>
                         </a:rPr>
                         <a:t>What they sell</a:t>
                       </a:r>
                       <a:endParaRPr lang="en-US" sz="1600" dirty="0">
-                        <a:latin typeface="Cambria" charset="0"/>
-                        <a:ea typeface="Cambria" charset="0"/>
-                        <a:cs typeface="Cambria" charset="0"/>
+                        <a:latin typeface="Helvetica" charset="0"/>
+                        <a:ea typeface="Helvetica" charset="0"/>
+                        <a:cs typeface="Helvetica" charset="0"/>
                       </a:endParaRPr>
                     </a:p>
                   </a:txBody>
@@ -14243,16 +14243,16 @@
                           <a:solidFill>
                             <a:schemeClr val="bg1"/>
                           </a:solidFill>
-                          <a:latin typeface="Cambria" pitchFamily="34" charset="0"/>
-                          <a:ea typeface="Cambria" pitchFamily="34" charset="-122"/>
-                          <a:cs typeface="Cambria" pitchFamily="34" charset="-120"/>
+                          <a:latin typeface="Helvetica" pitchFamily="34" charset="0"/>
+                          <a:ea typeface="Helvetica" pitchFamily="34" charset="-122"/>
+                          <a:cs typeface="Helvetica" pitchFamily="34" charset="-120"/>
                         </a:rPr>
                         <a:t>What we did</a:t>
                       </a:r>
                       <a:endParaRPr lang="en-US" sz="1600" dirty="0">
-                        <a:latin typeface="Cambria" charset="0"/>
-                        <a:ea typeface="Cambria" charset="0"/>
-                        <a:cs typeface="Cambria" charset="0"/>
+                        <a:latin typeface="Helvetica" charset="0"/>
+                        <a:ea typeface="Helvetica" charset="0"/>
+                        <a:cs typeface="Helvetica" charset="0"/>
                       </a:endParaRPr>
                     </a:p>
                   </a:txBody>
@@ -15022,9 +15022,9 @@
                 <a:solidFill>
                   <a:schemeClr val="accent3"/>
                 </a:solidFill>
-                <a:latin typeface="Cambria" pitchFamily="34" charset="0"/>
-                <a:ea typeface="Cambria" pitchFamily="34" charset="-122"/>
-                <a:cs typeface="Cambria" pitchFamily="34" charset="-120"/>
+                <a:latin typeface="Helvetica" pitchFamily="34" charset="0"/>
+                <a:ea typeface="Helvetica" pitchFamily="34" charset="-122"/>
+                <a:cs typeface="Helvetica" pitchFamily="34" charset="-120"/>
               </a:rPr>
               <a:t>03</a:t>
             </a:r>
@@ -15063,9 +15063,9 @@
                 <a:solidFill>
                   <a:schemeClr val="bg2"/>
                 </a:solidFill>
-                <a:latin typeface="Cambria" pitchFamily="34" charset="0"/>
-                <a:ea typeface="Cambria" pitchFamily="34" charset="-122"/>
-                <a:cs typeface="Cambria" pitchFamily="34" charset="-120"/>
+                <a:latin typeface="Helvetica" pitchFamily="34" charset="0"/>
+                <a:ea typeface="Helvetica" pitchFamily="34" charset="-122"/>
+                <a:cs typeface="Helvetica" pitchFamily="34" charset="-120"/>
               </a:rPr>
               <a:t>What we offer</a:t>
             </a:r>
@@ -15207,7 +15207,7 @@
     </a:clrScheme>
     <a:fontScheme name="Extol Affiliates">
       <a:majorFont>
-        <a:latin typeface="Cambria"/>
+        <a:latin typeface="Helvetica"/>
         <a:ea typeface=""/>
         <a:cs typeface=""/>
         <a:font script="Jpan" typeface="游ゴシック Light"/>
@@ -15259,7 +15259,7 @@
         <a:font script="Tfng" typeface="Ebrima"/>
       </a:majorFont>
       <a:minorFont>
-        <a:latin typeface="Calibri"/>
+        <a:latin typeface="Helvetica"/>
         <a:ea typeface=""/>
         <a:cs typeface=""/>
         <a:font script="Jpan" typeface="游ゴシック"/>
